--- a/public/materialy/1L/7/Prezentace k hodinám/3. Kybernetické hrozby a phishing.pptx
+++ b/public/materialy/1L/7/Prezentace k hodinám/3. Kybernetické hrozby a phishing.pptx
@@ -548,7 +548,7 @@
           </a:p>
           <a:p xmlns:a="http://schemas.openxmlformats.org/drawingml/2006/main">
             <a:r>
-              <a:t>Soubory: 03_podezrela_schranka.html z balíčku V2, digitální pracovní sešit</a:t>
+              <a:t>Soubory: 3. Podezřelá schránka.html z balíčku V2, digitální pracovní sešit</a:t>
             </a:r>
           </a:p>
           <a:p xmlns:a="http://schemas.openxmlformats.org/drawingml/2006/main">
@@ -808,7 +808,7 @@
           <a:lstStyle xmlns:a="http://schemas.openxmlformats.org/drawingml/2006/main"/>
           <a:p xmlns:a="http://schemas.openxmlformats.org/drawingml/2006/main">
             <a:r>
-              <a:t>Hlavní aktivita využívá: 03_podezrela_schranka.html z balíčku V2, digitální pracovní sešit</a:t>
+              <a:t>Hlavní aktivita využívá: 3. Podezřelá schránka.html z balíčku V2, digitální pracovní sešit</a:t>
             </a:r>
           </a:p>
           <a:p xmlns:a="http://schemas.openxmlformats.org/drawingml/2006/main">
@@ -3480,7 +3480,7 @@
               </a:defRPr>
             </a:pPr>
             <a:r>
-              <a:t>03_podezrela_schranka.html z balíčku V2, digitální pracovní sešit</a:t>
+              <a:t>3. Podezřelá schránka.html z balíčku V2, digitální pracovní sešit</a:t>
             </a:r>
           </a:p>
         </p:txBody>

--- a/public/materialy/1L/7/Prezentace k hodinám/3. Kybernetické hrozby a phishing.pptx
+++ b/public/materialy/1L/7/Prezentace k hodinám/3. Kybernetické hrozby a phishing.pptx
@@ -3480,7 +3480,7 @@
               </a:defRPr>
             </a:pPr>
             <a:r>
-              <a:t>3. Podezřelá schránka.html z balíčku V2, digitální pracovní sešit</a:t>
+              <a:t>3. Podezřelá schránka.html ze složky Podklady k aktivitám, digitální pracovní sešit</a:t>
             </a:r>
           </a:p>
         </p:txBody>

--- a/public/materialy/1L/7/Prezentace k hodinám/3. Kybernetické hrozby a phishing.pptx
+++ b/public/materialy/1L/7/Prezentace k hodinám/3. Kybernetické hrozby a phishing.pptx
@@ -558,7 +558,7 @@
           </a:p>
           <a:p xmlns:a="http://schemas.openxmlformats.org/drawingml/2006/main">
             <a:r>
-              <a:t>Před otevřením dalšího snímku stručně uveďte téma a nechte studenty připravit pracovní soubory.</a:t>
+              <a:t>Před otevřením dalšího snímku stručně uveď téma a nech studenty připravit pracovní soubory.</a:t>
             </a:r>
           </a:p>
         </p:txBody>
@@ -648,7 +648,7 @@
           </a:p>
           <a:p xmlns:a="http://schemas.openxmlformats.org/drawingml/2006/main">
             <a:r>
-              <a:t>Neprozrazujte správnou odpověď. Cílem je zachytit počáteční úsudek, ke kterému se třída vrátí při reflexi.</a:t>
+              <a:t>Neprozrazuj správnou odpověď. Cílem je zachytit počáteční úsudek, ke kterému se třída vrátí při reflexi.</a:t>
             </a:r>
           </a:p>
         </p:txBody>
@@ -738,7 +738,7 @@
           </a:p>
           <a:p xmlns:a="http://schemas.openxmlformats.org/drawingml/2006/main">
             <a:r>
-              <a:t>Nechte studenty doplnit příklad ke každému bodu. Přechod k aktivitě proveďte otázkou: Jak tyto tři body použijeme na dnešní soubor?</a:t>
+              <a:t>Nech studenty doplnit příklad ke každému bodu. Přechod k aktivitě proveď otázkou: Jak tyto tři body použijeme na dnešní soubor?</a:t>
             </a:r>
           </a:p>
         </p:txBody>
@@ -818,12 +818,12 @@
           </a:p>
           <a:p xmlns:a="http://schemas.openxmlformats.org/drawingml/2006/main">
             <a:r>
-              <a:t>28–35 min – Porovnání s legitimní zprávou: Ukažte, že samotný odkaz či bezchybný jazyk nerozhoduje.</a:t>
-            </a:r>
-          </a:p>
-          <a:p xmlns:a="http://schemas.openxmlformats.org/drawingml/2006/main">
-            <a:r>
-              <a:t>35–42 min – Reakce po kompromitaci: Nechte studenty seřadit kroky podle omezení další škody.</a:t>
+              <a:t>28–35 min – Porovnání s legitimní zprávou: Ukaž, že samotný odkaz či bezchybný jazyk nerozhoduje.</a:t>
+            </a:r>
+          </a:p>
+          <a:p xmlns:a="http://schemas.openxmlformats.org/drawingml/2006/main">
+            <a:r>
+              <a:t>35–42 min – Reakce po kompromitaci: Nech studenty seřadit kroky podle omezení další škody.</a:t>
             </a:r>
           </a:p>
           <a:p xmlns:a="http://schemas.openxmlformats.org/drawingml/2006/main">
@@ -833,7 +833,7 @@
           </a:p>
           <a:p xmlns:a="http://schemas.openxmlformats.org/drawingml/2006/main">
             <a:r>
-              <a:t>Během práce nepřebírejte myš za studenta. Pomáhejte otázkami z dalšího snímku a žádejte, aby každé rozhodnutí opřel o konkrétní znak nebo zdroj.</a:t>
+              <a:t>Během práce nepřebírej myš za studenta. Pomáhej otázkami z dalšího snímku a žádej, aby každé rozhodnutí opřel o konkrétní znak nebo zdroj.</a:t>
             </a:r>
           </a:p>
         </p:txBody>
@@ -913,7 +913,7 @@
           </a:p>
           <a:p xmlns:a="http://schemas.openxmlformats.org/drawingml/2006/main">
             <a:r>
-              <a:t>Podpora: Rozdělte zprávy mezi skupiny a použijte společnou šablonu: znak – možné riziko – bezpečná reakce.</a:t>
+              <a:t>Podpora: Rozděl zprávy mezi skupiny a použij společnou šablonu: znak – možné riziko – bezpečná reakce.</a:t>
             </a:r>
           </a:p>
           <a:p xmlns:a="http://schemas.openxmlformats.org/drawingml/2006/main">
@@ -923,7 +923,7 @@
           </a:p>
           <a:p xmlns:a="http://schemas.openxmlformats.org/drawingml/2006/main">
             <a:r>
-              <a:t>Pro rychlou mezikontrolu nechte dvojice vyměnit výstup a označit jeden dobře doložený bod a jednu otázku, která ještě zůstává.</a:t>
+              <a:t>Pro rychlou mezikontrolu nech dvojice vyměnit výstup a označit jeden dobře doložený bod a jednu otázku, která ještě zůstává.</a:t>
             </a:r>
           </a:p>
         </p:txBody>
@@ -998,12 +998,12 @@
           </a:p>
           <a:p xmlns:a="http://schemas.openxmlformats.org/drawingml/2006/main">
             <a:r>
-              <a:t>Časté chyby a intervence: „Podvod poznám podle chyb v češtině.“ → Moderní podvod může být bezchybný; vraťte se ke kontextu, doméně a požadované akci. | „Když jsem klikl, je pozdě.“ → Zdůrazněte rychlé nahlášení, změnu hesla z důvěryhodného zařízení a zrušení relací. | „Stačí zprávu smazat.“ → Po zadání údajů je nutné zabezpečit účet a zkontrolovat obnovu, 2FA a opakovaná hesla.</a:t>
-            </a:r>
-          </a:p>
-          <a:p xmlns:a="http://schemas.openxmlformats.org/drawingml/2006/main">
-            <a:r>
-              <a:t>Nečtěte celý klíč. Vyberte dva studentské postupy, které vedou k odlišným závěrům, a nechte třídu určit, který je lépe podložený.</a:t>
+              <a:t>Časté chyby a intervence: „Podvod poznám podle chyb v češtině.“ → Moderní podvod může být bezchybný; vrať se ke kontextu, doméně a požadované akci. | „Když jsem klikl, je pozdě.“ → Zdůrazni rychlé nahlášení, změnu hesla z důvěryhodného zařízení a zrušení relací. | „Stačí zprávu smazat.“ → Po zadání údajů je nutné zabezpečit účet a zkontrolovat obnovu, 2FA a opakovaná hesla.</a:t>
+            </a:r>
+          </a:p>
+          <a:p xmlns:a="http://schemas.openxmlformats.org/drawingml/2006/main">
+            <a:r>
+              <a:t>Nečti celý klíč. Vyber dva studentské postupy, které vedou k odlišným závěrům, a nech třídu určit, který je lépe podložený.</a:t>
             </a:r>
           </a:p>
         </p:txBody>
@@ -1078,7 +1078,7 @@
           </a:p>
           <a:p xmlns:a="http://schemas.openxmlformats.org/drawingml/2006/main">
             <a:r>
-              <a:t>Podpora: Rozdělte zprávy mezi skupiny a použijte společnou šablonu: znak – možné riziko – bezpečná reakce.</a:t>
+              <a:t>Podpora: Rozděl zprávy mezi skupiny a použij společnou šablonu: znak – možné riziko – bezpečná reakce.</a:t>
             </a:r>
           </a:p>
           <a:p xmlns:a="http://schemas.openxmlformats.org/drawingml/2006/main">
@@ -1093,7 +1093,7 @@
           </a:p>
           <a:p xmlns:a="http://schemas.openxmlformats.org/drawingml/2006/main">
             <a:r>
-              <a:t>Vyberte způsob odevzdání předem. Odpověď použijte jako diagnostiku pro začátek další hodiny; nehodnoťte pouze formální správnost, ale konkrétnost a zdůvodnění.</a:t>
+              <a:t>Vyber způsob odevzdání předem. Odpověď použij jako diagnostiku pro začátek další hodiny; nehodnoť pouze formální správnost, ale konkrétnost a zdůvodnění.</a:t>
             </a:r>
           </a:p>
         </p:txBody>

--- a/public/materialy/1L/7/Prezentace k hodinám/3. Kybernetické hrozby a phishing.pptx
+++ b/public/materialy/1L/7/Prezentace k hodinám/3. Kybernetické hrozby a phishing.pptx
@@ -543,22 +543,22 @@
           <a:lstStyle xmlns:a="http://schemas.openxmlformats.org/drawingml/2006/main"/>
           <a:p xmlns:a="http://schemas.openxmlformats.org/drawingml/2006/main">
             <a:r>
-              <a:t>Výukový cíl: Student analyzuje realistickou schránku, rozpozná phishing, smishing, QR podvod a rizikovou přílohu a stanoví reakci po chybě.</a:t>
-            </a:r>
-          </a:p>
-          <a:p xmlns:a="http://schemas.openxmlformats.org/drawingml/2006/main">
-            <a:r>
-              <a:t>Soubory: 3. Podezřelá schránka.html z balíčku V2, digitální pracovní sešit</a:t>
-            </a:r>
-          </a:p>
-          <a:p xmlns:a="http://schemas.openxmlformats.org/drawingml/2006/main">
-            <a:r>
-              <a:t>Výstup: Analýza šesti zpráv a seřazený postup po zadání hesla do podvodného formuláře.</a:t>
-            </a:r>
-          </a:p>
-          <a:p xmlns:a="http://schemas.openxmlformats.org/drawingml/2006/main">
-            <a:r>
-              <a:t>Před otevřením dalšího snímku stručně uveď téma a nech studenty připravit pracovní soubory.</a:t>
+              <a:t>Výukový cíl: Student analyzuje realistickou schránku, rozpozná phishing, smishing, QR podvod a rizikovou přílohu a stanoví reakci po chybě.</a:t>
+            </a:r>
+          </a:p>
+          <a:p xmlns:a="http://schemas.openxmlformats.org/drawingml/2006/main">
+            <a:r>
+              <a:t>Soubory: 3. Podezřelá schránka.html z balíčku V2, digitální pracovní sešit</a:t>
+            </a:r>
+          </a:p>
+          <a:p xmlns:a="http://schemas.openxmlformats.org/drawingml/2006/main">
+            <a:r>
+              <a:t>Výstup: Analýza šesti zpráv a seřazený postup po zadání hesla do podvodného formuláře.</a:t>
+            </a:r>
+          </a:p>
+          <a:p xmlns:a="http://schemas.openxmlformats.org/drawingml/2006/main">
+            <a:r>
+              <a:t>Před otevřením dalšího snímku stručně uveď téma a nech studenty připravit pracovní soubory.</a:t>
             </a:r>
           </a:p>
         </p:txBody>
@@ -638,7 +638,7 @@
           </a:p>
           <a:p xmlns:a="http://schemas.openxmlformats.org/drawingml/2006/main">
             <a:r>
-              <a:t>Postup učitele: Studenti označí jednu zprávu k přednostní kontrole bez otevření detailu.</a:t>
+              <a:t>Postup učitele: Studenti označí jednu zprávu k přednostní kontrole bez otevření detailu.</a:t>
             </a:r>
           </a:p>
           <a:p xmlns:a="http://schemas.openxmlformats.org/drawingml/2006/main">
@@ -733,12 +733,12 @@
           </a:p>
           <a:p xmlns:a="http://schemas.openxmlformats.org/drawingml/2006/main">
             <a:r>
-              <a:t>Klíčové závěry: A – ověření účtu: Phishing: cizí doména, hrozba blokace, časový tlak a žádost o přihlášení. | B – zásilka: Smishing: nečekaná drobná platba a cizí doména; stav ověřit přímo u dopravce. | C – změna učebny: Pravděpodobně běžná zpráva v důvěryhodném školním systému; při pochybnostech ověřit rozvrh.</a:t>
-            </a:r>
-          </a:p>
-          <a:p xmlns:a="http://schemas.openxmlformats.org/drawingml/2006/main">
-            <a:r>
-              <a:t>Nech studenty doplnit příklad ke každému bodu. Přechod k aktivitě proveď otázkou: Jak tyto tři body použijeme na dnešní soubor?</a:t>
+              <a:t>Klíčové závěry: A – ověření účtu: Phishing: cizí doména, hrozba blokace, časový tlak a žádost o přihlášení. | B – zásilka: Smishing: nečekaná drobná platba a cizí doména; stav ověřit přímo u dopravce. | C – změna učebny: Pravděpodobně běžná zpráva v důvěryhodném školním systému; při pochybnostech ověřit rozvrh.</a:t>
+            </a:r>
+          </a:p>
+          <a:p xmlns:a="http://schemas.openxmlformats.org/drawingml/2006/main">
+            <a:r>
+              <a:t>Nech studenty doplnit příklad ke každému bodu. Přechod k aktivitě proveď otázkou: Jak tyto tři body použijeme na dnešní soubor?</a:t>
             </a:r>
           </a:p>
         </p:txBody>
@@ -808,17 +808,17 @@
           <a:lstStyle xmlns:a="http://schemas.openxmlformats.org/drawingml/2006/main"/>
           <a:p xmlns:a="http://schemas.openxmlformats.org/drawingml/2006/main">
             <a:r>
-              <a:t>Hlavní aktivita využívá: 3. Podezřelá schránka.html z balíčku V2, digitální pracovní sešit</a:t>
-            </a:r>
-          </a:p>
-          <a:p xmlns:a="http://schemas.openxmlformats.org/drawingml/2006/main">
-            <a:r>
-              <a:t>10–28 min – Analýza šesti zpráv: Skupiny otevírají detaily a zapisují znaky, cíl útočníka a reakci.</a:t>
-            </a:r>
-          </a:p>
-          <a:p xmlns:a="http://schemas.openxmlformats.org/drawingml/2006/main">
-            <a:r>
-              <a:t>28–35 min – Porovnání s legitimní zprávou: Ukaž, že samotný odkaz či bezchybný jazyk nerozhoduje.</a:t>
+              <a:t>Hlavní aktivita využívá: 3. Podezřelá schránka.html z balíčku V2, digitální pracovní sešit</a:t>
+            </a:r>
+          </a:p>
+          <a:p xmlns:a="http://schemas.openxmlformats.org/drawingml/2006/main">
+            <a:r>
+              <a:t>10–28 min – Analýza šesti zpráv: Skupiny otevírají detaily a zapisují znaky, cíl útočníka a reakci.</a:t>
+            </a:r>
+          </a:p>
+          <a:p xmlns:a="http://schemas.openxmlformats.org/drawingml/2006/main">
+            <a:r>
+              <a:t>28–35 min – Porovnání s legitimní zprávou: Ukaž, že samotný odkaz či bezchybný jazyk nerozhoduje.</a:t>
             </a:r>
           </a:p>
           <a:p xmlns:a="http://schemas.openxmlformats.org/drawingml/2006/main">
@@ -828,12 +828,12 @@
           </a:p>
           <a:p xmlns:a="http://schemas.openxmlformats.org/drawingml/2006/main">
             <a:r>
-              <a:t>Požadovaný výstup: Analýza šesti zpráv a seřazený postup po zadání hesla do podvodného formuláře.</a:t>
-            </a:r>
-          </a:p>
-          <a:p xmlns:a="http://schemas.openxmlformats.org/drawingml/2006/main">
-            <a:r>
-              <a:t>Během práce nepřebírej myš za studenta. Pomáhej otázkami z dalšího snímku a žádej, aby každé rozhodnutí opřel o konkrétní znak nebo zdroj.</a:t>
+              <a:t>Požadovaný výstup: Analýza šesti zpráv a seřazený postup po zadání hesla do podvodného formuláře.</a:t>
+            </a:r>
+          </a:p>
+          <a:p xmlns:a="http://schemas.openxmlformats.org/drawingml/2006/main">
+            <a:r>
+              <a:t>Během práce nepřebírej myš za studenta. Pomáhej otázkami z dalšího snímku a žádej, aby každé rozhodnutí opřel o konkrétní znak nebo zdroj.</a:t>
             </a:r>
           </a:p>
         </p:txBody>
@@ -903,27 +903,27 @@
           <a:lstStyle xmlns:a="http://schemas.openxmlformats.org/drawingml/2006/main"/>
           <a:p xmlns:a="http://schemas.openxmlformats.org/drawingml/2006/main">
             <a:r>
-              <a:t>Kritérium úspěchu: Student u každé zprávy uvede nejméně dva znaky a bezpečnou reakci; nespoléhá pouze na pravopis.</a:t>
-            </a:r>
-          </a:p>
-          <a:p xmlns:a="http://schemas.openxmlformats.org/drawingml/2006/main">
-            <a:r>
-              <a:t>Vodicí otázky: Shoduje se zobrazované jméno s adresou a doménou odesílatele? | Požaduje zpráva akci, kterou lze provést v oficiální aplikaci bez jejího odkazu? | Co uděláš jako první, pokud už byly údaje zadány?</a:t>
-            </a:r>
-          </a:p>
-          <a:p xmlns:a="http://schemas.openxmlformats.org/drawingml/2006/main">
-            <a:r>
-              <a:t>Podpora: Rozděl zprávy mezi skupiny a použij společnou šablonu: znak – možné riziko – bezpečná reakce.</a:t>
-            </a:r>
-          </a:p>
-          <a:p xmlns:a="http://schemas.openxmlformats.org/drawingml/2006/main">
-            <a:r>
-              <a:t>Rozšíření: Studenti sestaví pravidlo, které zachytí více typů podvodu, ale neoznačí automaticky každou zprávu s odkazem.</a:t>
-            </a:r>
-          </a:p>
-          <a:p xmlns:a="http://schemas.openxmlformats.org/drawingml/2006/main">
-            <a:r>
-              <a:t>Pro rychlou mezikontrolu nech dvojice vyměnit výstup a označit jeden dobře doložený bod a jednu otázku, která ještě zůstává.</a:t>
+              <a:t>Kritérium úspěchu: Student u každé zprávy uvede nejméně dva znaky a bezpečnou reakci; nespoléhá pouze na pravopis.</a:t>
+            </a:r>
+          </a:p>
+          <a:p xmlns:a="http://schemas.openxmlformats.org/drawingml/2006/main">
+            <a:r>
+              <a:t>Vodicí otázky: Shoduje se zobrazované jméno s adresou a doménou odesílatele? | Požaduje zpráva akci, kterou lze provést v oficiální aplikaci bez jejího odkazu? | Co uděláš jako první, pokud už byly údaje zadány?</a:t>
+            </a:r>
+          </a:p>
+          <a:p xmlns:a="http://schemas.openxmlformats.org/drawingml/2006/main">
+            <a:r>
+              <a:t>Podpora: Rozděl zprávy mezi skupiny a použij společnou šablonu: znak – možné riziko – bezpečná reakce.</a:t>
+            </a:r>
+          </a:p>
+          <a:p xmlns:a="http://schemas.openxmlformats.org/drawingml/2006/main">
+            <a:r>
+              <a:t>Rozšíření: Studenti sestaví pravidlo, které zachytí více typů podvodu, ale neoznačí automaticky každou zprávu s odkazem.</a:t>
+            </a:r>
+          </a:p>
+          <a:p xmlns:a="http://schemas.openxmlformats.org/drawingml/2006/main">
+            <a:r>
+              <a:t>Pro rychlou mezikontrolu nech dvojice vyměnit výstup a označit jeden dobře doložený bod a jednu otázku, která ještě zůstává.</a:t>
             </a:r>
           </a:p>
         </p:txBody>
@@ -993,17 +993,17 @@
           <a:lstStyle xmlns:a="http://schemas.openxmlformats.org/drawingml/2006/main"/>
           <a:p xmlns:a="http://schemas.openxmlformats.org/drawingml/2006/main">
             <a:r>
-              <a:t>Očekávané závěry: A – ověření účtu: Phishing: cizí doména, hrozba blokace, časový tlak a žádost o přihlášení. | B – zásilka: Smishing: nečekaná drobná platba a cizí doména; stav ověřit přímo u dopravce. | C – změna učebny: Pravděpodobně běžná zpráva v důvěryhodném školním systému; při pochybnostech ověřit rozvrh. | D – QR kód: QR phishing; přelepený kód nepoužívat, zvolit oficiální aplikaci nebo ručně známou adresu. | E – podpora: Sociální inženýrství; neinstalovat vzdálený přístup a hovor ukončit. | F – faktura: Riziková makra v neočekávaném XLSM; přílohu neotevírat a ověřit dodavatele jiným kanálem.</a:t>
-            </a:r>
-          </a:p>
-          <a:p xmlns:a="http://schemas.openxmlformats.org/drawingml/2006/main">
-            <a:r>
-              <a:t>Časté chyby a intervence: „Podvod poznám podle chyb v češtině.“ → Moderní podvod může být bezchybný; vrať se ke kontextu, doméně a požadované akci. | „Když jsem klikl, je pozdě.“ → Zdůrazni rychlé nahlášení, změnu hesla z důvěryhodného zařízení a zrušení relací. | „Stačí zprávu smazat.“ → Po zadání údajů je nutné zabezpečit účet a zkontrolovat obnovu, 2FA a opakovaná hesla.</a:t>
-            </a:r>
-          </a:p>
-          <a:p xmlns:a="http://schemas.openxmlformats.org/drawingml/2006/main">
-            <a:r>
-              <a:t>Nečti celý klíč. Vyber dva studentské postupy, které vedou k odlišným závěrům, a nech třídu určit, který je lépe podložený.</a:t>
+              <a:t>Očekávané závěry: A – ověření účtu: Phishing: cizí doména, hrozba blokace, časový tlak a žádost o přihlášení. | B – zásilka: Smishing: nečekaná drobná platba a cizí doména; stav ověřit přímo u dopravce. | C – změna učebny: Pravděpodobně běžná zpráva v důvěryhodném školním systému; při pochybnostech ověřit rozvrh. | D – QR kód: QR phishing; přelepený kód nepoužívat, zvolit oficiální aplikaci nebo ručně známou adresu. | E – podpora: Sociální inženýrství; neinstalovat vzdálený přístup a hovor ukončit. | F – faktura: Riziková makra v neočekávaném XLSM; přílohu neotevírat a ověřit dodavatele jiným kanálem.</a:t>
+            </a:r>
+          </a:p>
+          <a:p xmlns:a="http://schemas.openxmlformats.org/drawingml/2006/main">
+            <a:r>
+              <a:t>Časté chyby a intervence: „Podvod poznám podle chyb v češtině.“ → Moderní podvod může být bezchybný; vrať se ke kontextu, doméně a požadované akci. | „Když jsem klikl, je pozdě.“ → Zdůrazni rychlé nahlášení, změnu hesla z důvěryhodného zařízení a zrušení relací. | „Stačí zprávu smazat.“ → Po zadání údajů je nutné zabezpečit účet a zkontrolovat obnovu, 2FA a opakovaná hesla.</a:t>
+            </a:r>
+          </a:p>
+          <a:p xmlns:a="http://schemas.openxmlformats.org/drawingml/2006/main">
+            <a:r>
+              <a:t>Nečti celý klíč. Vyber dva studentské postupy, které vedou k odlišným závěrům, a nech třídu určit, který je lépe podložený.</a:t>
             </a:r>
           </a:p>
         </p:txBody>
@@ -1073,27 +1073,27 @@
           <a:lstStyle xmlns:a="http://schemas.openxmlformats.org/drawingml/2006/main"/>
           <a:p xmlns:a="http://schemas.openxmlformats.org/drawingml/2006/main">
             <a:r>
-              <a:t>Exit ticket: Napiš tři první kroky po zadání hesla na falešné stránce v pořadí.</a:t>
-            </a:r>
-          </a:p>
-          <a:p xmlns:a="http://schemas.openxmlformats.org/drawingml/2006/main">
-            <a:r>
-              <a:t>Podpora: Rozděl zprávy mezi skupiny a použij společnou šablonu: znak – možné riziko – bezpečná reakce.</a:t>
-            </a:r>
-          </a:p>
-          <a:p xmlns:a="http://schemas.openxmlformats.org/drawingml/2006/main">
-            <a:r>
-              <a:t>Rozšíření: Studenti sestaví pravidlo, které zachytí více typů podvodu, ale neoznačí automaticky každou zprávu s odkazem.</a:t>
-            </a:r>
-          </a:p>
-          <a:p xmlns:a="http://schemas.openxmlformats.org/drawingml/2006/main">
-            <a:r>
-              <a:t>Když technika selže: Texty všech šesti situací jsou v pracovním sešitu; při problému s HTML je lze analyzovat bez prohlížeče.</a:t>
-            </a:r>
-          </a:p>
-          <a:p xmlns:a="http://schemas.openxmlformats.org/drawingml/2006/main">
-            <a:r>
-              <a:t>Vyber způsob odevzdání předem. Odpověď použij jako diagnostiku pro začátek další hodiny; nehodnoť pouze formální správnost, ale konkrétnost a zdůvodnění.</a:t>
+              <a:t>Exit ticket: Napiš tři první kroky po zadání hesla na falešné stránce v pořadí.</a:t>
+            </a:r>
+          </a:p>
+          <a:p xmlns:a="http://schemas.openxmlformats.org/drawingml/2006/main">
+            <a:r>
+              <a:t>Podpora: Rozděl zprávy mezi skupiny a použij společnou šablonu: znak – možné riziko – bezpečná reakce.</a:t>
+            </a:r>
+          </a:p>
+          <a:p xmlns:a="http://schemas.openxmlformats.org/drawingml/2006/main">
+            <a:r>
+              <a:t>Rozšíření: Studenti sestaví pravidlo, které zachytí více typů podvodu, ale neoznačí automaticky každou zprávu s odkazem.</a:t>
+            </a:r>
+          </a:p>
+          <a:p xmlns:a="http://schemas.openxmlformats.org/drawingml/2006/main">
+            <a:r>
+              <a:t>Když technika selže: Texty všech šesti situací jsou v pracovním sešitu; při problému s HTML je lze analyzovat bez prohlížeče.</a:t>
+            </a:r>
+          </a:p>
+          <a:p xmlns:a="http://schemas.openxmlformats.org/drawingml/2006/main">
+            <a:r>
+              <a:t>Vyber způsob odevzdání předem. Odpověď použij jako diagnostiku pro začátek další hodiny; nehodnoť pouze formální správnost, ale konkrétnost a zdůvodnění.</a:t>
             </a:r>
           </a:p>
         </p:txBody>
@@ -1824,7 +1824,7 @@
             </a:pPr>
             <a:r>
               <a:t>INTERNET, BEZPEČNOST
-A PRÁCE S INFORMACEMI</a:t>
+A PRÁCE S INFORMACEMI</a:t>
             </a:r>
           </a:p>
         </p:txBody>
@@ -1869,7 +1869,7 @@
               </a:defRPr>
             </a:pPr>
             <a:r>
-              <a:t>Kybernetické hrozby a phishing</a:t>
+              <a:t>Kybernetické hrozby a phishing</a:t>
             </a:r>
           </a:p>
         </p:txBody>
@@ -1914,7 +1914,7 @@
               </a:defRPr>
             </a:pPr>
             <a:r>
-              <a:t>Student analyzuje realistickou schránku, rozpozná phishing, smishing, QR podvod a rizikovou přílohu a stanoví reakci po chybě.</a:t>
+              <a:t>Student analyzuje realistickou schránku, rozpozná phishing, smishing, QR podvod a rizikovou přílohu a stanoví reakci po chybě.</a:t>
             </a:r>
           </a:p>
         </p:txBody>
@@ -2894,7 +2894,7 @@
               </a:defRPr>
             </a:pPr>
             <a:r>
-              <a:t>Prověř doménu a akci</a:t>
+              <a:t>Prověř doménu a akci</a:t>
             </a:r>
           </a:p>
         </p:txBody>
@@ -2939,7 +2939,7 @@
               </a:defRPr>
             </a:pPr>
             <a:r>
-              <a:t>Zobrazované jméno nestačí. Sleduj adresu, doménu, přílohu a to, co zpráva požaduje.</a:t>
+              <a:t>Zobrazované jméno nestačí. Sleduj adresu, doménu, přílohu a to, co zpráva požaduje.</a:t>
             </a:r>
           </a:p>
         </p:txBody>
@@ -3150,7 +3150,7 @@
               </a:defRPr>
             </a:pPr>
             <a:r>
-              <a:t>Nejde o rychlý tip. Jde o postup, který lze vysvětlit a zopakovat.</a:t>
+              <a:t>Nejde o rychlý tip. Jde o postup, který lze vysvětlit a zopakovat.</a:t>
             </a:r>
           </a:p>
         </p:txBody>
@@ -3480,7 +3480,7 @@
               </a:defRPr>
             </a:pPr>
             <a:r>
-              <a:t>3. Podezřelá schránka.html ze složky Podklady k aktivitám, digitální pracovní sešit</a:t>
+              <a:t>3. Podezřelá schránka.html ze složky Podklady k aktivitám, digitální pracovní sešit</a:t>
             </a:r>
           </a:p>
         </p:txBody>
@@ -3646,7 +3646,7 @@
               </a:defRPr>
             </a:pPr>
             <a:r>
-              <a:t>U každé zprávy najdi nejméně dva konkrétní znaky — nespoléhej jen na pravopis.</a:t>
+              <a:t>U každé zprávy najdi nejméně dva konkrétní znaky — nespoléhej jen na pravopis.</a:t>
             </a:r>
           </a:p>
         </p:txBody>
@@ -3812,7 +3812,7 @@
               </a:defRPr>
             </a:pPr>
             <a:r>
-              <a:t>Napiš, co po tobě zpráva chce a jaká škoda by mohla následovat.</a:t>
+              <a:t>Napiš, co po tobě zpráva chce a jaká škoda by mohla následovat.</a:t>
             </a:r>
           </a:p>
         </p:txBody>
@@ -4068,7 +4068,7 @@
               </a:defRPr>
             </a:pPr>
             <a:r>
-              <a:t>Analýza šesti zpráv a seřazený postup po zadání hesla do podvodného formuláře.</a:t>
+              <a:t>Analýza šesti zpráv a seřazený postup po zadání hesla do podvodného formuláře.</a:t>
             </a:r>
           </a:p>
         </p:txBody>
@@ -4474,7 +4474,7 @@
               </a:defRPr>
             </a:pPr>
             <a:r>
-              <a:t>Student u každé zprávy uvede nejméně dva znaky a bezpečnou reakci; nespoléhá pouze na pravopis.</a:t>
+              <a:t>Student u každé zprávy uvede nejméně dva znaky a bezpečnou reakci; nespoléhá pouze na pravopis.</a:t>
             </a:r>
           </a:p>
         </p:txBody>
@@ -4640,7 +4640,7 @@
               </a:defRPr>
             </a:pPr>
             <a:r>
-              <a:t>Shoduje se zobrazované jméno s adresou a doménou odesílatele?</a:t>
+              <a:t>Shoduje se zobrazované jméno s adresou a doménou odesílatele?</a:t>
             </a:r>
           </a:p>
         </p:txBody>
@@ -4806,7 +4806,7 @@
               </a:defRPr>
             </a:pPr>
             <a:r>
-              <a:t>Požaduje zpráva akci, kterou lze provést v oficiální aplikaci bez jejího odkazu?</a:t>
+              <a:t>Požaduje zpráva akci, kterou lze provést v oficiální aplikaci bez jejího odkazu?</a:t>
             </a:r>
           </a:p>
         </p:txBody>
@@ -5347,7 +5347,7 @@
               </a:defRPr>
             </a:pPr>
             <a:r>
-              <a:t>Phishing: cizí doména, hrozba blokace, časový tlak a žádost o přihlášení.</a:t>
+              <a:t>Phishing: cizí doména, hrozba blokace, časový tlak a žádost o přihlášení.</a:t>
             </a:r>
           </a:p>
         </p:txBody>
@@ -5437,7 +5437,7 @@
               </a:defRPr>
             </a:pPr>
             <a:r>
-              <a:t>Smishing: nečekaná drobná platba a cizí doména; stav ověřit přímo u dopravce.</a:t>
+              <a:t>Smishing: nečekaná drobná platba a cizí doména; stav ověřit přímo u dopravce.</a:t>
             </a:r>
           </a:p>
         </p:txBody>
@@ -5527,7 +5527,7 @@
               </a:defRPr>
             </a:pPr>
             <a:r>
-              <a:t>Pravděpodobně běžná zpráva v důvěryhodném školním systému; při pochybnostech ověřit rozvrh.</a:t>
+              <a:t>Pravděpodobně běžná zpráva v důvěryhodném školním systému; při pochybnostech ověřit rozvrh.</a:t>
             </a:r>
           </a:p>
         </p:txBody>
@@ -5648,7 +5648,7 @@
               </a:defRPr>
             </a:pPr>
             <a:r>
-              <a:t>„Podvod poznám podle chyb v češtině.“</a:t>
+              <a:t>„Podvod poznám podle chyb v češtině.“</a:t>
             </a:r>
           </a:p>
         </p:txBody>
@@ -5693,7 +5693,7 @@
               </a:defRPr>
             </a:pPr>
             <a:r>
-              <a:t>Moderní podvod může být bezchybný; vraťte se ke kontextu, doméně a požadované akci.</a:t>
+              <a:t>Moderní podvod může být bezchybný; vraťte se ke kontextu, doméně a požadované akci.</a:t>
             </a:r>
           </a:p>
         </p:txBody>
@@ -5738,7 +5738,7 @@
               </a:defRPr>
             </a:pPr>
             <a:r>
-              <a:t>Vrať se k úvodnímu rozhodnutí. Co bys teď změnil — a proč?</a:t>
+              <a:t>Vrať se k úvodnímu rozhodnutí. Co bys teď změnil — a proč?</a:t>
             </a:r>
           </a:p>
         </p:txBody>
@@ -5933,7 +5933,7 @@
               </a:defRPr>
             </a:pPr>
             <a:r>
-              <a:t>Napiš tři první kroky po zadání hesla na falešné stránce v pořadí.</a:t>
+              <a:t>Napiš tři první kroky po zadání hesla na falešné stránce v pořadí.</a:t>
             </a:r>
           </a:p>
         </p:txBody>
